--- a/docs/week-13/cen429-week-13-sunum.en.pptx
+++ b/docs/week-13/cen429-week-13-sunum.en.pptx
@@ -23990,40 +23990,30 @@
           </a:p>
         </p:txBody>
       </p:sp>
-      <p:sp>
-        <p:nvSpPr>
-          <p:cNvPr id="7" name="TextBox 6"/>
-          <p:cNvSpPr txBox="1"/>
-          <p:nvPr/>
-        </p:nvSpPr>
-        <p:spPr>
-          <a:xfrm>
-            <a:off x="640080" y="1325880"/>
-            <a:ext cx="10911535" cy="4616958"/>
-          </a:xfrm>
-          <a:prstGeom prst="rect">
-            <a:avLst/>
-          </a:prstGeom>
-          <a:noFill/>
-        </p:spPr>
-        <p:txBody>
-          <a:bodyPr wrap="square" lIns="45720" rIns="45720">
-            <a:spAutoFit/>
-          </a:bodyPr>
-          <a:lstStyle/>
-          <a:p>
-            <a:pPr algn="l"/>
-            <a:r>
-              <a:rPr sz="1300" b="0">
-                <a:solidFill>
-                  <a:srgbClr val="1F2D3A"/>
-                </a:solidFill>
-              </a:rPr>
-              <a:t>&lt;svg viewBox="0 0 960 250" style="width:96%;height:auto;display:block;margin:4px auto" font-family="sans-serif"&gt; &lt;rect x="15" y="80" width="200" height="80" rx="10" fill="#eef2ff" stroke="#4054b2" stroke-width="2"/&gt;&lt;text x="115" y="112" text-anchor="middle" font-size="16" fill="#2a3a8c" font-weight="bold"&gt;TEHDİT / STANDART&lt;/text&gt;&lt;text x="115" y="138" text-anchor="middle" font-size="13" fill="#333"&gt;neden var?&lt;/text&gt; &lt;rect x="260" y="80" width="200" height="80" rx="10" fill="#e8f6f7" stroke="#0a9396" stroke-width="2"/&gt;&lt;text x="360" y="112" text-anchor="middle" font-size="16" fill="#005f66" font-weight="bold"&gt;GEREKSİNİM&lt;/text&gt;&lt;text x="360" y="138" text-anchor="middle" font-size="13" fill="#333"&gt;ölçülebilir ifade&lt;/text&gt; &lt;rect x="505" y="80" width="200" height="80" rx="10" fill="#eaf4ea" stroke="#2e7d32" stroke-width="2"/&gt;&lt;text x="605" y="112" text-anchor="middle" font-size="16" fill="#1b5e20" font-weight="bold"&gt;TASARIM / KOD&lt;/text&gt;&lt;text x="605" y="138" text-anchor="middle" font-size="13" fill="#333"&gt;nasıl yapıldı&lt;/text&gt; &lt;rect x="750" y="80" width="200" height="80" rx="10" fill="#fdf1e7" stroke="#b5651d" stroke-width="2"/&gt;&lt;text x="850" y="112" text-anchor="middle" font-size="16" fill="#8a4b12" font-weight="bold"&gt;TEST / KANIT&lt;/text&gt;&lt;text x="850" y="138" text-anchor="middle" font-size="13" fill="#333"&gt;karşılandı mı&lt;/text&gt; &lt;line x1="215" y1="112" x2="260" y2="112" stroke="#2e7d32" stroke-width="3" marker-end="url(#f13)"/&gt; &lt;line x1="460" y1="112" x2="505" y2="112" stroke="#2e7d32" stroke-width="3" marker-end="url(#f13)"/&gt; &lt;line x1="705" y1="112" x2="750" y2="112" stroke="#2e7d32" stroke-width="3" marker-end="url(#f13)"/&gt; &lt;line x1="260" y1="132" x2="215" y2="132" stroke="#c0392b" stroke-width="2.5" marker-end="url(#b13)"/&gt; &lt;line x1="505" y1="132" x2="460" y2="132" stroke="#c0392b" stroke-width="2.5" marker-end="url(#b13)"/&gt; &lt;line x1="750" y1="132" x2="705" y2="132" stroke="#c0392b" stroke-width="2.5" marker-end="url(#b13)"/&gt; &lt;text x="480" y="45" text-anchor="middle" font-size="16" fill="#2e7d32" font-weight="bold"&gt;ileri: her tehdit bir gereksinime, her gereksinim bir kanıta →&lt;/text&gt; &lt;text x="480" y="205" text-anchor="middle" font-size="15" fill="#c0392b"&gt;← geri: her kanıt/kod hangi gereksinimden geldi? (kaynaksız kod, kanıtsız "karşılandı" = kırmızı bayrak)&lt;/text&gt; &lt;defs&gt; &lt;marker id="f13" markerWidth="9" markerHeight="9" refX="7" refY="3" orient="auto"&gt;&lt;path d="M0,0 L7,3 L0,6 Z" fill="#2e7d32"/&gt;&lt;/marker&gt; &lt;marker id="b13" markerWidth="9" markerHeight="9" refX="7" refY="3" orient="auto"&gt;&lt;path d="M0,0 L7,3 L0,6 Z" fill="#c0392b"/&gt;&lt;/marker&gt; &lt;/defs&gt; &lt;/svg&gt;</a:t>
-            </a:r>
-          </a:p>
-        </p:txBody>
-      </p:sp>
+      <p:pic>
+        <p:nvPicPr>
+          <p:cNvPr id="7" name="Picture 6" descr="h13-01-izlenebilirlik.png"/>
+          <p:cNvPicPr>
+            <a:picLocks noChangeAspect="1"/>
+          </p:cNvPicPr>
+          <p:nvPr/>
+        </p:nvPicPr>
+        <p:blipFill>
+          <a:blip r:embed="rId3"/>
+          <a:stretch>
+            <a:fillRect/>
+          </a:stretch>
+        </p:blipFill>
+        <p:spPr>
+          <a:xfrm>
+            <a:off x="1833529" y="1325880"/>
+            <a:ext cx="8524636" cy="3518033"/>
+          </a:xfrm>
+          <a:prstGeom prst="rect">
+            <a:avLst/>
+          </a:prstGeom>
+        </p:spPr>
+      </p:pic>
     </p:spTree>
   </p:cSld>
   <p:clrMapOvr>
